--- a/slides/22_Reinforcement_Learning.pptx
+++ b/slides/22_Reinforcement_Learning.pptx
@@ -6518,8 +6518,8 @@
             <a:chExt cx="3700546" cy="3683006"/>
           </a:xfrm>
         </p:grpSpPr>
-        <mc:AlternateContent xmlns:mc="http://schemas.openxmlformats.org/markup-compatibility/2006" xmlns:a14="http://schemas.microsoft.com/office/drawing/2010/main">
-          <mc:Choice Requires="a14">
+        <mc:AlternateContent xmlns:mc="http://schemas.openxmlformats.org/markup-compatibility/2006">
+          <mc:Choice xmlns:a14="http://schemas.microsoft.com/office/drawing/2010/main" Requires="a14">
             <p:sp>
               <p:nvSpPr>
                 <p:cNvPr id="9" name="TextBox 8">
@@ -6667,7 +6667,7 @@
               </p:txBody>
             </p:sp>
           </mc:Choice>
-          <mc:Fallback xmlns="">
+          <mc:Fallback>
             <p:sp>
               <p:nvSpPr>
                 <p:cNvPr id="9" name="TextBox 8">
@@ -13802,7 +13802,7 @@
         </p:nvSpPr>
         <p:spPr>
           <a:xfrm>
-            <a:off x="874295" y="1697572"/>
+            <a:off x="874295" y="1592246"/>
             <a:ext cx="10515600" cy="257277"/>
           </a:xfrm>
         </p:spPr>
@@ -13907,7 +13907,7 @@
         </p:nvGrpSpPr>
         <p:grpSpPr>
           <a:xfrm>
-            <a:off x="1689059" y="2071567"/>
+            <a:off x="1689059" y="1966241"/>
             <a:ext cx="8813881" cy="1767559"/>
             <a:chOff x="1752600" y="2199067"/>
             <a:chExt cx="8813881" cy="1767559"/>
@@ -14790,7 +14790,7 @@
             </p:nvSpPr>
             <p:spPr>
               <a:xfrm>
-                <a:off x="898358" y="4012175"/>
+                <a:off x="898358" y="3895855"/>
                 <a:ext cx="10515600" cy="2733545"/>
               </a:xfrm>
               <a:prstGeom prst="rect">
@@ -14799,7 +14799,7 @@
             </p:spPr>
             <p:txBody>
               <a:bodyPr vert="horz" lIns="91440" tIns="45720" rIns="91440" bIns="45720" rtlCol="0">
-                <a:normAutofit fontScale="47500" lnSpcReduction="20000"/>
+                <a:normAutofit fontScale="62500" lnSpcReduction="20000"/>
               </a:bodyPr>
               <a:lstStyle>
                 <a:lvl1pPr marL="228600" indent="-228600" algn="l" defTabSz="914400" rtl="0" eaLnBrk="1" latinLnBrk="0" hangingPunct="1">
@@ -15059,11 +15059,6 @@
                   <a:rPr lang="en-US" dirty="0"/>
                   <a:t>Executed the policy.</a:t>
                 </a:r>
-              </a:p>
-              <a:p>
-                <a:pPr marL="0" indent="0">
-                  <a:buNone/>
-                </a:pPr>
                 <a:endParaRPr lang="en-US" b="1" dirty="0"/>
               </a:p>
               <a:p>
@@ -15217,9 +15212,6 @@
                 </a:r>
               </a:p>
               <a:p>
-                <a:endParaRPr lang="en-US" dirty="0"/>
-              </a:p>
-              <a:p>
                 <a:pPr marL="0" indent="0">
                   <a:buNone/>
                 </a:pPr>
@@ -15248,7 +15240,7 @@
             </p:nvSpPr>
             <p:spPr>
               <a:xfrm>
-                <a:off x="898358" y="4012175"/>
+                <a:off x="898358" y="3895855"/>
                 <a:ext cx="10515600" cy="2733545"/>
               </a:xfrm>
               <a:prstGeom prst="rect">
@@ -15257,7 +15249,7 @@
               <a:blipFill>
                 <a:blip r:embed="rId6"/>
                 <a:stretch>
-                  <a:fillRect l="-58" t="-2004"/>
+                  <a:fillRect l="-464" t="-3563" b="-1782"/>
                 </a:stretch>
               </a:blipFill>
             </p:spPr>
@@ -15464,7 +15456,7 @@
                                         <p:tgtEl>
                                           <p:spTgt spid="5">
                                             <p:txEl>
-                                              <p:pRg st="5" end="5"/>
+                                              <p:pRg st="4" end="4"/>
                                             </p:txEl>
                                           </p:spTgt>
                                         </p:tgtEl>
@@ -15495,7 +15487,7 @@
                                         <p:tgtEl>
                                           <p:spTgt spid="5">
                                             <p:txEl>
-                                              <p:pRg st="6" end="6"/>
+                                              <p:pRg st="5" end="5"/>
                                             </p:txEl>
                                           </p:spTgt>
                                         </p:tgtEl>
@@ -15526,7 +15518,7 @@
                                         <p:tgtEl>
                                           <p:spTgt spid="5">
                                             <p:txEl>
-                                              <p:pRg st="7" end="7"/>
+                                              <p:pRg st="6" end="6"/>
                                             </p:txEl>
                                           </p:spTgt>
                                         </p:tgtEl>
@@ -15557,7 +15549,7 @@
                                         <p:tgtEl>
                                           <p:spTgt spid="5">
                                             <p:txEl>
-                                              <p:pRg st="8" end="8"/>
+                                              <p:pRg st="7" end="7"/>
                                             </p:txEl>
                                           </p:spTgt>
                                         </p:tgtEl>
@@ -15588,7 +15580,7 @@
                                         <p:tgtEl>
                                           <p:spTgt spid="5">
                                             <p:txEl>
-                                              <p:pRg st="9" end="9"/>
+                                              <p:pRg st="8" end="8"/>
                                             </p:txEl>
                                           </p:spTgt>
                                         </p:tgtEl>
@@ -15619,7 +15611,7 @@
                                         <p:tgtEl>
                                           <p:spTgt spid="5">
                                             <p:txEl>
-                                              <p:pRg st="11" end="11"/>
+                                              <p:pRg st="9" end="9"/>
                                             </p:txEl>
                                           </p:spTgt>
                                         </p:tgtEl>
@@ -22390,7 +22382,7 @@
         <p:spPr/>
         <p:txBody>
           <a:bodyPr>
-            <a:normAutofit fontScale="85000" lnSpcReduction="20000"/>
+            <a:normAutofit fontScale="62500" lnSpcReduction="20000"/>
           </a:bodyPr>
           <a:lstStyle/>
           <a:p>
@@ -22439,6 +22431,37 @@
             <a:r>
               <a:rPr lang="en-US" dirty="0"/>
               <a:t>. This is an online learning process that provides positive reinforcement through rewards.</a:t>
+            </a:r>
+          </a:p>
+          <a:p>
+            <a:endParaRPr lang="en-US" dirty="0"/>
+          </a:p>
+          <a:p>
+            <a:r>
+              <a:rPr lang="en-US" dirty="0"/>
+              <a:t>Key questions are:</a:t>
+            </a:r>
+          </a:p>
+          <a:p>
+            <a:pPr lvl="1"/>
+            <a:r>
+              <a:rPr lang="en-US" b="1" dirty="0"/>
+              <a:t>Sample efficiency</a:t>
+            </a:r>
+            <a:r>
+              <a:rPr lang="en-US" dirty="0"/>
+              <a:t>: How many actions do we need to try in the environment?</a:t>
+            </a:r>
+          </a:p>
+          <a:p>
+            <a:pPr lvl="1"/>
+            <a:r>
+              <a:rPr lang="en-US" b="1" dirty="0"/>
+              <a:t>Stability</a:t>
+            </a:r>
+            <a:r>
+              <a:rPr lang="en-US" dirty="0"/>
+              <a:t>: Does the algorithm converge to a stable solution?</a:t>
             </a:r>
           </a:p>
           <a:p>
@@ -22672,6 +22695,153 @@
                       </p:childTnLst>
                     </p:cTn>
                   </p:par>
+                  <p:par>
+                    <p:cTn id="19" fill="hold">
+                      <p:stCondLst>
+                        <p:cond delay="indefinite"/>
+                      </p:stCondLst>
+                      <p:childTnLst>
+                        <p:par>
+                          <p:cTn id="20" fill="hold">
+                            <p:stCondLst>
+                              <p:cond delay="0"/>
+                            </p:stCondLst>
+                            <p:childTnLst>
+                              <p:par>
+                                <p:cTn id="21" presetID="1" presetClass="entr" presetSubtype="0" fill="hold" nodeType="clickEffect">
+                                  <p:stCondLst>
+                                    <p:cond delay="0"/>
+                                  </p:stCondLst>
+                                  <p:childTnLst>
+                                    <p:set>
+                                      <p:cBhvr>
+                                        <p:cTn id="22" dur="1" fill="hold">
+                                          <p:stCondLst>
+                                            <p:cond delay="0"/>
+                                          </p:stCondLst>
+                                        </p:cTn>
+                                        <p:tgtEl>
+                                          <p:spTgt spid="3">
+                                            <p:txEl>
+                                              <p:pRg st="7" end="7"/>
+                                            </p:txEl>
+                                          </p:spTgt>
+                                        </p:tgtEl>
+                                        <p:attrNameLst>
+                                          <p:attrName>style.visibility</p:attrName>
+                                        </p:attrNameLst>
+                                      </p:cBhvr>
+                                      <p:to>
+                                        <p:strVal val="visible"/>
+                                      </p:to>
+                                    </p:set>
+                                  </p:childTnLst>
+                                </p:cTn>
+                              </p:par>
+                            </p:childTnLst>
+                          </p:cTn>
+                        </p:par>
+                      </p:childTnLst>
+                    </p:cTn>
+                  </p:par>
+                  <p:par>
+                    <p:cTn id="23" fill="hold">
+                      <p:stCondLst>
+                        <p:cond delay="indefinite"/>
+                      </p:stCondLst>
+                      <p:childTnLst>
+                        <p:par>
+                          <p:cTn id="24" fill="hold">
+                            <p:stCondLst>
+                              <p:cond delay="0"/>
+                            </p:stCondLst>
+                            <p:childTnLst>
+                              <p:par>
+                                <p:cTn id="25" presetID="1" presetClass="entr" presetSubtype="0" fill="hold" nodeType="clickEffect">
+                                  <p:stCondLst>
+                                    <p:cond delay="0"/>
+                                  </p:stCondLst>
+                                  <p:childTnLst>
+                                    <p:set>
+                                      <p:cBhvr>
+                                        <p:cTn id="26" dur="1" fill="hold">
+                                          <p:stCondLst>
+                                            <p:cond delay="0"/>
+                                          </p:stCondLst>
+                                        </p:cTn>
+                                        <p:tgtEl>
+                                          <p:spTgt spid="3">
+                                            <p:txEl>
+                                              <p:pRg st="8" end="8"/>
+                                            </p:txEl>
+                                          </p:spTgt>
+                                        </p:tgtEl>
+                                        <p:attrNameLst>
+                                          <p:attrName>style.visibility</p:attrName>
+                                        </p:attrNameLst>
+                                      </p:cBhvr>
+                                      <p:to>
+                                        <p:strVal val="visible"/>
+                                      </p:to>
+                                    </p:set>
+                                  </p:childTnLst>
+                                </p:cTn>
+                              </p:par>
+                            </p:childTnLst>
+                          </p:cTn>
+                        </p:par>
+                      </p:childTnLst>
+                    </p:cTn>
+                  </p:par>
+                  <p:par>
+                    <p:cTn id="27" fill="hold">
+                      <p:stCondLst>
+                        <p:cond delay="indefinite"/>
+                      </p:stCondLst>
+                      <p:childTnLst>
+                        <p:par>
+                          <p:cTn id="28" fill="hold">
+                            <p:stCondLst>
+                              <p:cond delay="0"/>
+                            </p:stCondLst>
+                            <p:childTnLst>
+                              <p:par>
+                                <p:cTn id="29" presetID="1" presetClass="entr" presetSubtype="0" fill="hold" nodeType="clickEffect">
+                                  <p:stCondLst>
+                                    <p:cond delay="0"/>
+                                  </p:stCondLst>
+                                  <p:childTnLst>
+                                    <p:set>
+                                      <p:cBhvr>
+                                        <p:cTn id="30" dur="1" fill="hold">
+                                          <p:stCondLst>
+                                            <p:cond delay="0"/>
+                                          </p:stCondLst>
+                                        </p:cTn>
+                                        <p:tgtEl>
+                                          <p:spTgt spid="3">
+                                            <p:txEl>
+                                              <p:pRg st="10" end="10"/>
+                                            </p:txEl>
+                                          </p:spTgt>
+                                        </p:tgtEl>
+                                        <p:attrNameLst>
+                                          <p:attrName>style.visibility</p:attrName>
+                                        </p:attrNameLst>
+                                      </p:cBhvr>
+                                      <p:to>
+                                        <p:strVal val="visible"/>
+                                      </p:to>
+                                    </p:set>
+                                  </p:childTnLst>
+                                </p:cTn>
+                              </p:par>
+                            </p:childTnLst>
+                          </p:cTn>
+                        </p:par>
+                      </p:childTnLst>
+                    </p:cTn>
+                  </p:par>
                 </p:childTnLst>
               </p:cTn>
               <p:prevCondLst>
@@ -22859,8 +23029,8 @@
           </a:p>
         </p:txBody>
       </p:sp>
-      <mc:AlternateContent xmlns:mc="http://schemas.openxmlformats.org/markup-compatibility/2006" xmlns:a14="http://schemas.microsoft.com/office/drawing/2010/main">
-        <mc:Choice Requires="a14">
+      <mc:AlternateContent xmlns:mc="http://schemas.openxmlformats.org/markup-compatibility/2006">
+        <mc:Choice xmlns:a14="http://schemas.microsoft.com/office/drawing/2010/main" Requires="a14">
           <p:sp>
             <p:nvSpPr>
               <p:cNvPr id="9" name="Speech Bubble: Rectangle with Corners Rounded 8">
@@ -22946,13 +23116,13 @@
                 </a14:m>
                 <a:r>
                   <a:rPr lang="en-US" sz="1600" dirty="0"/>
-                  <a:t> increases, it can exploit good actions more.</a:t>
+                  <a:t> increases, it exploits good actions more.</a:t>
                 </a:r>
               </a:p>
             </p:txBody>
           </p:sp>
         </mc:Choice>
-        <mc:Fallback xmlns="">
+        <mc:Fallback>
           <p:sp>
             <p:nvSpPr>
               <p:cNvPr id="9" name="Speech Bubble: Rectangle with Corners Rounded 8">
@@ -34161,13 +34331,13 @@
             <p:nvPr/>
           </p:nvPicPr>
           <p:blipFill>
-            <a:blip r:embed="rId3">
+            <a:blip>
               <a:extLst>
                 <a:ext uri="{28A0092B-C50C-407E-A947-70E740481C1C}">
                   <a14:useLocalDpi xmlns:a14="http://schemas.microsoft.com/office/drawing/2010/main" val="0"/>
                 </a:ext>
                 <a:ext uri="{96DAC541-7B7A-43D3-8B79-37D633B846F1}">
-                  <asvg:svgBlip xmlns:asvg="http://schemas.microsoft.com/office/drawing/2016/SVG/main" r:embed="rId4"/>
+                  <asvg:svgBlip xmlns:asvg="http://schemas.microsoft.com/office/drawing/2016/SVG/main" r:embed="rId3"/>
                 </a:ext>
               </a:extLst>
             </a:blip>
@@ -34200,13 +34370,13 @@
             <p:nvPr/>
           </p:nvPicPr>
           <p:blipFill>
-            <a:blip r:embed="rId5">
+            <a:blip>
               <a:extLst>
                 <a:ext uri="{28A0092B-C50C-407E-A947-70E740481C1C}">
                   <a14:useLocalDpi xmlns:a14="http://schemas.microsoft.com/office/drawing/2010/main" val="0"/>
                 </a:ext>
                 <a:ext uri="{96DAC541-7B7A-43D3-8B79-37D633B846F1}">
-                  <asvg:svgBlip xmlns:asvg="http://schemas.microsoft.com/office/drawing/2016/SVG/main" r:embed="rId6"/>
+                  <asvg:svgBlip xmlns:asvg="http://schemas.microsoft.com/office/drawing/2016/SVG/main" r:embed="rId4"/>
                 </a:ext>
               </a:extLst>
             </a:blip>
@@ -34282,13 +34452,13 @@
             <p:nvPr/>
           </p:nvPicPr>
           <p:blipFill>
-            <a:blip r:embed="rId7">
+            <a:blip>
               <a:extLst>
                 <a:ext uri="{28A0092B-C50C-407E-A947-70E740481C1C}">
                   <a14:useLocalDpi xmlns:a14="http://schemas.microsoft.com/office/drawing/2010/main" val="0"/>
                 </a:ext>
                 <a:ext uri="{96DAC541-7B7A-43D3-8B79-37D633B846F1}">
-                  <asvg:svgBlip xmlns:asvg="http://schemas.microsoft.com/office/drawing/2016/SVG/main" r:embed="rId8"/>
+                  <asvg:svgBlip xmlns:asvg="http://schemas.microsoft.com/office/drawing/2016/SVG/main" r:embed="rId5"/>
                 </a:ext>
               </a:extLst>
             </a:blip>
@@ -34321,13 +34491,13 @@
             <p:nvPr/>
           </p:nvPicPr>
           <p:blipFill>
-            <a:blip r:embed="rId7">
+            <a:blip>
               <a:extLst>
                 <a:ext uri="{28A0092B-C50C-407E-A947-70E740481C1C}">
                   <a14:useLocalDpi xmlns:a14="http://schemas.microsoft.com/office/drawing/2010/main" val="0"/>
                 </a:ext>
                 <a:ext uri="{96DAC541-7B7A-43D3-8B79-37D633B846F1}">
-                  <asvg:svgBlip xmlns:asvg="http://schemas.microsoft.com/office/drawing/2016/SVG/main" r:embed="rId8"/>
+                  <asvg:svgBlip xmlns:asvg="http://schemas.microsoft.com/office/drawing/2016/SVG/main" r:embed="rId5"/>
                 </a:ext>
               </a:extLst>
             </a:blip>
@@ -36053,8 +36223,8 @@
           </mc:Fallback>
         </mc:AlternateContent>
       </p:grpSp>
-      <mc:AlternateContent xmlns:mc="http://schemas.openxmlformats.org/markup-compatibility/2006" xmlns:a14="http://schemas.microsoft.com/office/drawing/2010/main">
-        <mc:Choice Requires="a14">
+      <mc:AlternateContent xmlns:mc="http://schemas.openxmlformats.org/markup-compatibility/2006">
+        <mc:Choice xmlns:a14="http://schemas.microsoft.com/office/drawing/2010/main" Requires="a14">
           <p:sp>
             <p:nvSpPr>
               <p:cNvPr id="24" name="TextBox 23">
@@ -36070,7 +36240,7 @@
             <p:spPr>
               <a:xfrm>
                 <a:off x="6616700" y="4089146"/>
-                <a:ext cx="5086161" cy="2665473"/>
+                <a:ext cx="5086161" cy="2450030"/>
               </a:xfrm>
               <a:prstGeom prst="rect">
                 <a:avLst/>
@@ -36097,12 +36267,12 @@
               <a:lstStyle/>
               <a:p>
                 <a:r>
-                  <a:rPr lang="en-US" b="1" dirty="0"/>
+                  <a:rPr lang="en-US" sz="1600" b="1" dirty="0"/>
                   <a:t>Goal: </a:t>
                 </a:r>
                 <a:r>
-                  <a:rPr lang="en-US" dirty="0"/>
-                  <a:t>Observations and rewards depend on the state of the system, and the agent wants to maximize the expected discounted reward: </a:t>
+                  <a:rPr lang="en-US" sz="1600" dirty="0"/>
+                  <a:t>Observations and rewards depend on the state of the system, and the agent wants to maximize the expected sum of discounted rewards:</a:t>
                 </a:r>
               </a:p>
               <a:p>
@@ -36113,109 +36283,62 @@
                       <m:jc m:val="centerGroup"/>
                     </m:oMathParaPr>
                     <m:oMath xmlns:m="http://schemas.openxmlformats.org/officeDocument/2006/math">
-                      <m:r>
-                        <a:rPr lang="en-US" b="0" i="1" smtClean="0">
-                          <a:latin typeface="Cambria Math" panose="02040503050406030204" pitchFamily="18" charset="0"/>
-                        </a:rPr>
-                        <m:t>𝑈</m:t>
-                      </m:r>
-                      <m:r>
-                        <a:rPr lang="en-US" b="0" i="1" smtClean="0">
-                          <a:latin typeface="Cambria Math" panose="02040503050406030204" pitchFamily="18" charset="0"/>
-                        </a:rPr>
-                        <m:t>=</m:t>
-                      </m:r>
-                      <m:r>
-                        <a:rPr lang="en-US" b="0" i="1" smtClean="0">
-                          <a:latin typeface="Cambria Math" panose="02040503050406030204" pitchFamily="18" charset="0"/>
-                          <a:ea typeface="Cambria Math" panose="02040503050406030204" pitchFamily="18" charset="0"/>
-                        </a:rPr>
-                        <m:t>𝔼</m:t>
-                      </m:r>
-                      <m:d>
-                        <m:dPr>
-                          <m:begChr m:val="["/>
-                          <m:endChr m:val="]"/>
+                      <m:func>
+                        <m:funcPr>
                           <m:ctrlPr>
                             <a:rPr lang="en-US" b="0" i="1" smtClean="0">
                               <a:latin typeface="Cambria Math" panose="02040503050406030204" pitchFamily="18" charset="0"/>
+                              <a:ea typeface="Cambria Math" panose="02040503050406030204" pitchFamily="18" charset="0"/>
                             </a:rPr>
                           </m:ctrlPr>
-                        </m:dPr>
+                        </m:funcPr>
+                        <m:fName>
+                          <m:r>
+                            <m:rPr>
+                              <m:sty m:val="p"/>
+                            </m:rPr>
+                            <a:rPr lang="en-US" b="0" i="0" smtClean="0">
+                              <a:latin typeface="Cambria Math" panose="02040503050406030204" pitchFamily="18" charset="0"/>
+                              <a:ea typeface="Cambria Math" panose="02040503050406030204" pitchFamily="18" charset="0"/>
+                            </a:rPr>
+                            <m:t>max</m:t>
+                          </m:r>
+                        </m:fName>
                         <m:e>
-                          <m:nary>
-                            <m:naryPr>
-                              <m:chr m:val="∑"/>
+                          <m:r>
+                            <a:rPr lang="en-US" b="0" i="1" smtClean="0">
+                              <a:latin typeface="Cambria Math" panose="02040503050406030204" pitchFamily="18" charset="0"/>
+                              <a:ea typeface="Cambria Math" panose="02040503050406030204" pitchFamily="18" charset="0"/>
+                            </a:rPr>
+                            <m:t> </m:t>
+                          </m:r>
+                          <m:r>
+                            <a:rPr lang="en-US" i="1">
+                              <a:latin typeface="Cambria Math" panose="02040503050406030204" pitchFamily="18" charset="0"/>
+                              <a:ea typeface="Cambria Math" panose="02040503050406030204" pitchFamily="18" charset="0"/>
+                            </a:rPr>
+                            <m:t>𝔼</m:t>
+                          </m:r>
+                          <m:d>
+                            <m:dPr>
+                              <m:begChr m:val="["/>
+                              <m:endChr m:val="]"/>
                               <m:ctrlPr>
                                 <a:rPr lang="en-US" i="1">
                                   <a:latin typeface="Cambria Math" panose="02040503050406030204" pitchFamily="18" charset="0"/>
                                 </a:rPr>
                               </m:ctrlPr>
-                            </m:naryPr>
-                            <m:sub>
-                              <m:r>
-                                <a:rPr lang="en-US" i="1">
-                                  <a:latin typeface="Cambria Math" panose="02040503050406030204" pitchFamily="18" charset="0"/>
-                                </a:rPr>
-                                <m:t>𝑡</m:t>
-                              </m:r>
-                              <m:r>
-                                <a:rPr lang="en-US" i="1">
-                                  <a:latin typeface="Cambria Math" panose="02040503050406030204" pitchFamily="18" charset="0"/>
-                                </a:rPr>
-                                <m:t>=0</m:t>
-                              </m:r>
-                            </m:sub>
-                            <m:sup>
-                              <m:r>
-                                <a:rPr lang="en-US" b="0" i="1" smtClean="0">
-                                  <a:latin typeface="Cambria Math" panose="02040503050406030204" pitchFamily="18" charset="0"/>
-                                </a:rPr>
-                                <m:t>𝑇</m:t>
-                              </m:r>
-                            </m:sup>
+                            </m:dPr>
                             <m:e>
-                              <m:sSup>
-                                <m:sSupPr>
+                              <m:nary>
+                                <m:naryPr>
+                                  <m:chr m:val="∑"/>
                                   <m:ctrlPr>
                                     <a:rPr lang="en-US" i="1">
                                       <a:latin typeface="Cambria Math" panose="02040503050406030204" pitchFamily="18" charset="0"/>
                                     </a:rPr>
                                   </m:ctrlPr>
-                                </m:sSupPr>
-                                <m:e>
-                                  <m:r>
-                                    <a:rPr lang="en-US" i="1">
-                                      <a:latin typeface="Cambria Math" panose="02040503050406030204" pitchFamily="18" charset="0"/>
-                                    </a:rPr>
-                                    <m:t>𝛾</m:t>
-                                  </m:r>
-                                </m:e>
-                                <m:sup>
-                                  <m:r>
-                                    <a:rPr lang="en-US" i="1">
-                                      <a:latin typeface="Cambria Math" panose="02040503050406030204" pitchFamily="18" charset="0"/>
-                                    </a:rPr>
-                                    <m:t>𝑡</m:t>
-                                  </m:r>
-                                </m:sup>
-                              </m:sSup>
-                              <m:sSub>
-                                <m:sSubPr>
-                                  <m:ctrlPr>
-                                    <a:rPr lang="en-US" i="1">
-                                      <a:latin typeface="Cambria Math" panose="02040503050406030204" pitchFamily="18" charset="0"/>
-                                    </a:rPr>
-                                  </m:ctrlPr>
-                                </m:sSubPr>
-                                <m:e>
-                                  <m:r>
-                                    <a:rPr lang="en-US" b="0" i="1" smtClean="0">
-                                      <a:latin typeface="Cambria Math" panose="02040503050406030204" pitchFamily="18" charset="0"/>
-                                    </a:rPr>
-                                    <m:t>𝑅</m:t>
-                                  </m:r>
-                                </m:e>
+                                </m:naryPr>
                                 <m:sub>
                                   <m:r>
                                     <a:rPr lang="en-US" i="1">
@@ -36223,20 +36346,92 @@
                                     </a:rPr>
                                     <m:t>𝑡</m:t>
                                   </m:r>
+                                  <m:r>
+                                    <a:rPr lang="en-US" i="1">
+                                      <a:latin typeface="Cambria Math" panose="02040503050406030204" pitchFamily="18" charset="0"/>
+                                    </a:rPr>
+                                    <m:t>=0</m:t>
+                                  </m:r>
                                 </m:sub>
-                              </m:sSub>
+                                <m:sup>
+                                  <m:r>
+                                    <a:rPr lang="en-US" i="1">
+                                      <a:latin typeface="Cambria Math" panose="02040503050406030204" pitchFamily="18" charset="0"/>
+                                    </a:rPr>
+                                    <m:t>𝑇</m:t>
+                                  </m:r>
+                                </m:sup>
+                                <m:e>
+                                  <m:sSup>
+                                    <m:sSupPr>
+                                      <m:ctrlPr>
+                                        <a:rPr lang="en-US" i="1">
+                                          <a:latin typeface="Cambria Math" panose="02040503050406030204" pitchFamily="18" charset="0"/>
+                                        </a:rPr>
+                                      </m:ctrlPr>
+                                    </m:sSupPr>
+                                    <m:e>
+                                      <m:r>
+                                        <a:rPr lang="en-US" i="1">
+                                          <a:latin typeface="Cambria Math" panose="02040503050406030204" pitchFamily="18" charset="0"/>
+                                        </a:rPr>
+                                        <m:t>𝛾</m:t>
+                                      </m:r>
+                                    </m:e>
+                                    <m:sup>
+                                      <m:r>
+                                        <a:rPr lang="en-US" i="1">
+                                          <a:latin typeface="Cambria Math" panose="02040503050406030204" pitchFamily="18" charset="0"/>
+                                        </a:rPr>
+                                        <m:t>𝑡</m:t>
+                                      </m:r>
+                                    </m:sup>
+                                  </m:sSup>
+                                  <m:sSub>
+                                    <m:sSubPr>
+                                      <m:ctrlPr>
+                                        <a:rPr lang="en-US" i="1">
+                                          <a:latin typeface="Cambria Math" panose="02040503050406030204" pitchFamily="18" charset="0"/>
+                                        </a:rPr>
+                                      </m:ctrlPr>
+                                    </m:sSubPr>
+                                    <m:e>
+                                      <m:r>
+                                        <a:rPr lang="en-US" i="1">
+                                          <a:latin typeface="Cambria Math" panose="02040503050406030204" pitchFamily="18" charset="0"/>
+                                        </a:rPr>
+                                        <m:t>𝑅</m:t>
+                                      </m:r>
+                                    </m:e>
+                                    <m:sub>
+                                      <m:r>
+                                        <a:rPr lang="en-US" i="1">
+                                          <a:latin typeface="Cambria Math" panose="02040503050406030204" pitchFamily="18" charset="0"/>
+                                        </a:rPr>
+                                        <m:t>𝑡</m:t>
+                                      </m:r>
+                                    </m:sub>
+                                  </m:sSub>
+                                  <m:r>
+                                    <a:rPr lang="en-US" i="1">
+                                      <a:latin typeface="Cambria Math" panose="02040503050406030204" pitchFamily="18" charset="0"/>
+                                    </a:rPr>
+                                    <m:t> </m:t>
+                                  </m:r>
+                                </m:e>
+                              </m:nary>
                             </m:e>
-                          </m:nary>
+                          </m:d>
                         </m:e>
-                      </m:d>
+                      </m:func>
                     </m:oMath>
                   </m:oMathPara>
                 </a14:m>
-                <a:endParaRPr lang="en-US" dirty="0"/>
+                <a:endParaRPr lang="en-US" sz="1600" dirty="0"/>
               </a:p>
               <a:p>
                 <a:pPr algn="r"/>
-                <a:endParaRPr lang="en-US" sz="1400" b="0" i="1" dirty="0">
+                <a:endParaRPr lang="en-US" sz="1200" b="0" i="1" dirty="0">
                   <a:latin typeface="Cambria Math" panose="02040503050406030204" pitchFamily="18" charset="0"/>
                 </a:endParaRPr>
               </a:p>
@@ -36246,14 +36441,14 @@
                     <m:sSub>
                       <m:sSubPr>
                         <m:ctrlPr>
-                          <a:rPr lang="en-US" sz="1400" b="0" i="1" smtClean="0">
+                          <a:rPr lang="en-US" sz="1200" b="0" i="1" smtClean="0">
                             <a:latin typeface="Cambria Math" panose="02040503050406030204" pitchFamily="18" charset="0"/>
                           </a:rPr>
                         </m:ctrlPr>
                       </m:sSubPr>
                       <m:e>
                         <m:r>
-                          <a:rPr lang="en-US" sz="1400" b="0" i="1" smtClean="0">
+                          <a:rPr lang="en-US" sz="1200" b="0" i="1" smtClean="0">
                             <a:latin typeface="Cambria Math" panose="02040503050406030204" pitchFamily="18" charset="0"/>
                           </a:rPr>
                           <m:t>𝑅</m:t>
@@ -36261,7 +36456,7 @@
                       </m:e>
                       <m:sub>
                         <m:r>
-                          <a:rPr lang="en-US" sz="1400" b="0" i="1" smtClean="0">
+                          <a:rPr lang="en-US" sz="1200" b="0" i="1" smtClean="0">
                             <a:latin typeface="Cambria Math" panose="02040503050406030204" pitchFamily="18" charset="0"/>
                           </a:rPr>
                           <m:t>𝑡</m:t>
@@ -36271,13 +36466,13 @@
                   </m:oMath>
                 </a14:m>
                 <a:r>
-                  <a:rPr lang="en-US" sz="1400" dirty="0"/>
+                  <a:rPr lang="en-US" sz="1200" dirty="0"/>
                   <a:t>… reward at time </a:t>
                 </a:r>
                 <a14:m>
                   <m:oMath xmlns:m="http://schemas.openxmlformats.org/officeDocument/2006/math">
                     <m:r>
-                      <a:rPr lang="en-US" sz="1400" i="1" dirty="0" smtClean="0">
+                      <a:rPr lang="en-US" sz="1200" i="1" dirty="0" smtClean="0">
                         <a:latin typeface="Cambria Math" panose="02040503050406030204" pitchFamily="18" charset="0"/>
                       </a:rPr>
                       <m:t>𝑡</m:t>
@@ -36285,10 +36480,10 @@
                   </m:oMath>
                 </a14:m>
                 <a:r>
-                  <a:rPr lang="en-US" sz="1400" dirty="0"/>
+                  <a:rPr lang="en-US" sz="1200" dirty="0"/>
                   <a:t> as a random variable</a:t>
                 </a:r>
-                <a:endParaRPr lang="en-US" sz="1400" b="0" i="1" dirty="0">
+                <a:endParaRPr lang="en-US" sz="1200" b="0" i="1" dirty="0">
                   <a:latin typeface="Cambria Math" panose="02040503050406030204" pitchFamily="18" charset="0"/>
                 </a:endParaRPr>
               </a:p>
@@ -36296,7 +36491,7 @@
                 <a14:m>
                   <m:oMath xmlns:m="http://schemas.openxmlformats.org/officeDocument/2006/math">
                     <m:r>
-                      <a:rPr lang="en-US" sz="1400" b="0" i="1" smtClean="0">
+                      <a:rPr lang="en-US" sz="1200" b="0" i="1" smtClean="0">
                         <a:latin typeface="Cambria Math" panose="02040503050406030204" pitchFamily="18" charset="0"/>
                       </a:rPr>
                       <m:t>𝛾</m:t>
@@ -36304,16 +36499,16 @@
                   </m:oMath>
                 </a14:m>
                 <a:r>
-                  <a:rPr lang="en-US" sz="1400" dirty="0"/>
+                  <a:rPr lang="en-US" sz="1200" dirty="0"/>
                   <a:t> … discounting factor</a:t>
                 </a:r>
                 <a:br>
-                  <a:rPr lang="en-US" sz="1400" dirty="0"/>
+                  <a:rPr lang="en-US" sz="1200" dirty="0"/>
                 </a:br>
                 <a14:m>
                   <m:oMath xmlns:m="http://schemas.openxmlformats.org/officeDocument/2006/math">
                     <m:r>
-                      <a:rPr lang="en-US" sz="1400" i="1" dirty="0">
+                      <a:rPr lang="en-US" sz="1200" i="1" dirty="0">
                         <a:latin typeface="Cambria Math" panose="02040503050406030204" pitchFamily="18" charset="0"/>
                       </a:rPr>
                       <m:t>𝑇</m:t>
@@ -36321,14 +36516,14 @@
                   </m:oMath>
                 </a14:m>
                 <a:r>
-                  <a:rPr lang="en-US" sz="1400" dirty="0"/>
+                  <a:rPr lang="en-US" sz="1200" dirty="0"/>
                   <a:t> … time horizon may be infinity</a:t>
                 </a:r>
               </a:p>
             </p:txBody>
           </p:sp>
         </mc:Choice>
-        <mc:Fallback xmlns="">
+        <mc:Fallback>
           <p:sp>
             <p:nvSpPr>
               <p:cNvPr id="24" name="TextBox 23">
@@ -36346,7 +36541,7 @@
             <p:spPr>
               <a:xfrm>
                 <a:off x="6616700" y="4089146"/>
-                <a:ext cx="5086161" cy="2665473"/>
+                <a:ext cx="5086161" cy="2450030"/>
               </a:xfrm>
               <a:prstGeom prst="rect">
                 <a:avLst/>
@@ -36354,7 +36549,7 @@
               <a:blipFill>
                 <a:blip r:embed="rId6"/>
                 <a:stretch>
-                  <a:fillRect l="-835" t="-1136" b="-909"/>
+                  <a:fillRect l="-477" t="-494" r="-1074" b="-741"/>
                 </a:stretch>
               </a:blipFill>
             </p:spPr>
@@ -36391,9 +36586,9 @@
         <p:grpSpPr>
           <a:xfrm>
             <a:off x="3733800" y="1322986"/>
-            <a:ext cx="3964939" cy="632399"/>
+            <a:ext cx="3964939" cy="641820"/>
             <a:chOff x="6972571" y="4920035"/>
-            <a:chExt cx="3964939" cy="632399"/>
+            <a:chExt cx="3964939" cy="641820"/>
           </a:xfrm>
         </p:grpSpPr>
         <mc:AlternateContent xmlns:mc="http://schemas.openxmlformats.org/markup-compatibility/2006" xmlns:a14="http://schemas.microsoft.com/office/drawing/2010/main">
@@ -36714,8 +36909,8 @@
             </a:fontRef>
           </p:style>
         </p:cxnSp>
-        <mc:AlternateContent xmlns:mc="http://schemas.openxmlformats.org/markup-compatibility/2006" xmlns:a14="http://schemas.microsoft.com/office/drawing/2010/main">
-          <mc:Choice Requires="a14">
+        <mc:AlternateContent xmlns:mc="http://schemas.openxmlformats.org/markup-compatibility/2006">
+          <mc:Choice xmlns:a14="http://schemas.microsoft.com/office/drawing/2010/main" Requires="a14">
             <p:sp>
               <p:nvSpPr>
                 <p:cNvPr id="13" name="TextBox 12">
@@ -36730,7 +36925,7 @@
               </p:nvSpPr>
               <p:spPr>
                 <a:xfrm>
-                  <a:off x="7640164" y="5043228"/>
+                  <a:off x="7617446" y="5315634"/>
                   <a:ext cx="751840" cy="246221"/>
                 </a:xfrm>
                 <a:prstGeom prst="rect">
@@ -36784,13 +36979,13 @@
               </p:txBody>
             </p:sp>
           </mc:Choice>
-          <mc:Fallback xmlns="">
+          <mc:Fallback>
             <p:sp>
               <p:nvSpPr>
-                <p:cNvPr id="23" name="TextBox 22">
+                <p:cNvPr id="13" name="TextBox 12">
                   <a:extLst>
                     <a:ext uri="{FF2B5EF4-FFF2-40B4-BE49-F238E27FC236}">
-                      <a16:creationId xmlns:a16="http://schemas.microsoft.com/office/drawing/2014/main" id="{8FD02EE2-AD9F-C310-E791-F3A0BC4DEB29}"/>
+                      <a16:creationId xmlns:a16="http://schemas.microsoft.com/office/drawing/2014/main" id="{D1EB2545-C58E-1621-B932-382B9EEBA7C5}"/>
                     </a:ext>
                   </a:extLst>
                 </p:cNvPr>
@@ -36801,7 +36996,7 @@
               </p:nvSpPr>
               <p:spPr>
                 <a:xfrm>
-                  <a:off x="7640164" y="5043228"/>
+                  <a:off x="7617446" y="5315634"/>
                   <a:ext cx="751840" cy="246221"/>
                 </a:xfrm>
                 <a:prstGeom prst="rect">
@@ -37254,8 +37449,8 @@
             </a:fontRef>
           </p:style>
         </p:cxnSp>
-        <mc:AlternateContent xmlns:mc="http://schemas.openxmlformats.org/markup-compatibility/2006" xmlns:a14="http://schemas.microsoft.com/office/drawing/2010/main">
-          <mc:Choice Requires="a14">
+        <mc:AlternateContent xmlns:mc="http://schemas.openxmlformats.org/markup-compatibility/2006">
+          <mc:Choice xmlns:a14="http://schemas.microsoft.com/office/drawing/2010/main" Requires="a14">
             <p:sp>
               <p:nvSpPr>
                 <p:cNvPr id="25" name="TextBox 24">
@@ -37310,58 +37505,40 @@
                         <m:jc m:val="centerGroup"/>
                       </m:oMathParaPr>
                       <m:oMath xmlns:m="http://schemas.openxmlformats.org/officeDocument/2006/math">
-                        <m:r>
-                          <a:rPr lang="en-US" sz="1100" b="1" i="1" dirty="0" smtClean="0">
-                            <a:latin typeface="Cambria Math" panose="02040503050406030204" pitchFamily="18" charset="0"/>
-                          </a:rPr>
-                          <m:t>𝑼</m:t>
-                        </m:r>
-                        <m:r>
-                          <a:rPr lang="en-US" sz="1100" b="1" i="1" dirty="0" smtClean="0">
-                            <a:latin typeface="Cambria Math" panose="02040503050406030204" pitchFamily="18" charset="0"/>
-                          </a:rPr>
-                          <m:t>(</m:t>
-                        </m:r>
                         <m:sSub>
                           <m:sSubPr>
                             <m:ctrlPr>
-                              <a:rPr lang="en-US" sz="1100" b="1" i="1" dirty="0" smtClean="0">
+                              <a:rPr lang="en-US" sz="1100" b="0" i="1" smtClean="0">
                                 <a:latin typeface="Cambria Math" panose="02040503050406030204" pitchFamily="18" charset="0"/>
                               </a:rPr>
                             </m:ctrlPr>
                           </m:sSubPr>
                           <m:e>
                             <m:r>
-                              <a:rPr lang="en-US" sz="1100" b="1" i="1" dirty="0" smtClean="0">
+                              <a:rPr lang="en-US" sz="1100" b="0" i="1" smtClean="0">
                                 <a:latin typeface="Cambria Math" panose="02040503050406030204" pitchFamily="18" charset="0"/>
                               </a:rPr>
-                              <m:t>𝒔</m:t>
+                              <m:t>𝑟</m:t>
                             </m:r>
                           </m:e>
                           <m:sub>
                             <m:r>
-                              <a:rPr lang="en-US" sz="1100" b="1" i="1" dirty="0" smtClean="0">
+                              <a:rPr lang="en-US" sz="1100" b="0" i="1" smtClean="0">
                                 <a:latin typeface="Cambria Math" panose="02040503050406030204" pitchFamily="18" charset="0"/>
                               </a:rPr>
-                              <m:t>𝑻</m:t>
+                              <m:t>𝑇</m:t>
                             </m:r>
                           </m:sub>
                         </m:sSub>
-                        <m:r>
-                          <a:rPr lang="en-US" sz="1100" b="1" i="1" dirty="0" smtClean="0">
-                            <a:latin typeface="Cambria Math" panose="02040503050406030204" pitchFamily="18" charset="0"/>
-                          </a:rPr>
-                          <m:t>)</m:t>
-                        </m:r>
                       </m:oMath>
                     </m:oMathPara>
                   </a14:m>
-                  <a:endParaRPr lang="en-US" sz="1100" b="1" dirty="0"/>
+                  <a:endParaRPr lang="en-US" sz="1100" dirty="0"/>
                 </a:p>
               </p:txBody>
             </p:sp>
           </mc:Choice>
-          <mc:Fallback xmlns="">
+          <mc:Fallback>
             <p:sp>
               <p:nvSpPr>
                 <p:cNvPr id="25" name="TextBox 24">
@@ -37387,7 +37564,7 @@
                 <a:blipFill>
                   <a:blip r:embed="rId13"/>
                   <a:stretch>
-                    <a:fillRect l="-5970" r="-11940" b="-6977"/>
+                    <a:fillRect/>
                   </a:stretch>
                 </a:blipFill>
                 <a:ln>
@@ -37409,8 +37586,8 @@
             </p:sp>
           </mc:Fallback>
         </mc:AlternateContent>
-        <mc:AlternateContent xmlns:mc="http://schemas.openxmlformats.org/markup-compatibility/2006" xmlns:a14="http://schemas.microsoft.com/office/drawing/2010/main">
-          <mc:Choice Requires="a14">
+        <mc:AlternateContent xmlns:mc="http://schemas.openxmlformats.org/markup-compatibility/2006">
+          <mc:Choice xmlns:a14="http://schemas.microsoft.com/office/drawing/2010/main" Requires="a14">
             <p:sp>
               <p:nvSpPr>
                 <p:cNvPr id="26" name="TextBox 25">
@@ -37465,18 +37642,6 @@
                         <m:jc m:val="centerGroup"/>
                       </m:oMathParaPr>
                       <m:oMath xmlns:m="http://schemas.openxmlformats.org/officeDocument/2006/math">
-                        <m:r>
-                          <a:rPr lang="en-US" sz="1100" i="1" dirty="0" smtClean="0">
-                            <a:latin typeface="Cambria Math" panose="02040503050406030204" pitchFamily="18" charset="0"/>
-                          </a:rPr>
-                          <m:t>𝑈</m:t>
-                        </m:r>
-                        <m:r>
-                          <a:rPr lang="en-US" sz="1100" i="1" dirty="0" smtClean="0">
-                            <a:latin typeface="Cambria Math" panose="02040503050406030204" pitchFamily="18" charset="0"/>
-                          </a:rPr>
-                          <m:t>(</m:t>
-                        </m:r>
                         <m:sSub>
                           <m:sSubPr>
                             <m:ctrlPr>
@@ -37490,30 +37655,18 @@
                               <a:rPr lang="en-US" sz="1100" i="1" dirty="0" smtClean="0">
                                 <a:latin typeface="Cambria Math" panose="02040503050406030204" pitchFamily="18" charset="0"/>
                               </a:rPr>
-                              <m:t>𝑠</m:t>
+                              <m:t>𝑟</m:t>
                             </m:r>
                           </m:e>
                           <m:sub>
                             <m:r>
-                              <a:rPr lang="en-US" sz="1100" b="1" i="1" dirty="0" smtClean="0">
-                                <a:latin typeface="Cambria Math" panose="02040503050406030204" pitchFamily="18" charset="0"/>
-                              </a:rPr>
-                              <m:t>𝑻</m:t>
-                            </m:r>
-                            <m:r>
                               <a:rPr lang="en-US" sz="1100" b="0" i="1" dirty="0" smtClean="0">
                                 <a:latin typeface="Cambria Math" panose="02040503050406030204" pitchFamily="18" charset="0"/>
                               </a:rPr>
-                              <m:t>−1</m:t>
+                              <m:t>2</m:t>
                             </m:r>
                           </m:sub>
                         </m:sSub>
-                        <m:r>
-                          <a:rPr lang="en-US" sz="1100" i="1" dirty="0" smtClean="0">
-                            <a:latin typeface="Cambria Math" panose="02040503050406030204" pitchFamily="18" charset="0"/>
-                          </a:rPr>
-                          <m:t>)</m:t>
-                        </m:r>
                       </m:oMath>
                     </m:oMathPara>
                   </a14:m>
@@ -37522,7 +37675,7 @@
               </p:txBody>
             </p:sp>
           </mc:Choice>
-          <mc:Fallback xmlns="">
+          <mc:Fallback>
             <p:sp>
               <p:nvSpPr>
                 <p:cNvPr id="26" name="TextBox 25">
@@ -37548,7 +37701,7 @@
                 <a:blipFill>
                   <a:blip r:embed="rId14"/>
                   <a:stretch>
-                    <a:fillRect l="-8537" r="-12195" b="-4651"/>
+                    <a:fillRect/>
                   </a:stretch>
                 </a:blipFill>
                 <a:ln>
@@ -37570,8 +37723,8 @@
             </p:sp>
           </mc:Fallback>
         </mc:AlternateContent>
-        <mc:AlternateContent xmlns:mc="http://schemas.openxmlformats.org/markup-compatibility/2006" xmlns:a14="http://schemas.microsoft.com/office/drawing/2010/main">
-          <mc:Choice Requires="a14">
+        <mc:AlternateContent xmlns:mc="http://schemas.openxmlformats.org/markup-compatibility/2006">
+          <mc:Choice xmlns:a14="http://schemas.microsoft.com/office/drawing/2010/main" Requires="a14">
             <p:sp>
               <p:nvSpPr>
                 <p:cNvPr id="27" name="TextBox 26">
@@ -37626,58 +37779,40 @@
                         <m:jc m:val="centerGroup"/>
                       </m:oMathParaPr>
                       <m:oMath xmlns:m="http://schemas.openxmlformats.org/officeDocument/2006/math">
-                        <m:r>
-                          <a:rPr lang="en-US" sz="1100" b="1" i="1" dirty="0" smtClean="0">
-                            <a:latin typeface="Cambria Math" panose="02040503050406030204" pitchFamily="18" charset="0"/>
-                          </a:rPr>
-                          <m:t>𝑼</m:t>
-                        </m:r>
-                        <m:r>
-                          <a:rPr lang="en-US" sz="1100" b="1" i="1" dirty="0" smtClean="0">
-                            <a:latin typeface="Cambria Math" panose="02040503050406030204" pitchFamily="18" charset="0"/>
-                          </a:rPr>
-                          <m:t>(</m:t>
-                        </m:r>
                         <m:sSub>
                           <m:sSubPr>
                             <m:ctrlPr>
-                              <a:rPr lang="en-US" sz="1100" b="1" i="1" dirty="0" smtClean="0">
+                              <a:rPr lang="en-US" sz="1100" i="1" dirty="0" smtClean="0">
                                 <a:latin typeface="Cambria Math" panose="02040503050406030204" pitchFamily="18" charset="0"/>
                               </a:rPr>
                             </m:ctrlPr>
                           </m:sSubPr>
                           <m:e>
                             <m:r>
-                              <a:rPr lang="en-US" sz="1100" b="1" i="1" dirty="0" smtClean="0">
+                              <a:rPr lang="en-US" sz="1100" b="0" i="1" dirty="0" smtClean="0">
                                 <a:latin typeface="Cambria Math" panose="02040503050406030204" pitchFamily="18" charset="0"/>
                               </a:rPr>
-                              <m:t>𝒔</m:t>
+                              <m:t>𝑟</m:t>
                             </m:r>
                           </m:e>
                           <m:sub>
                             <m:r>
-                              <a:rPr lang="en-US" sz="1100" b="1" i="1" dirty="0" smtClean="0">
+                              <a:rPr lang="en-US" sz="1100" b="0" i="1" dirty="0" smtClean="0">
                                 <a:latin typeface="Cambria Math" panose="02040503050406030204" pitchFamily="18" charset="0"/>
                               </a:rPr>
-                              <m:t>𝟏</m:t>
+                              <m:t>1</m:t>
                             </m:r>
                           </m:sub>
                         </m:sSub>
-                        <m:r>
-                          <a:rPr lang="en-US" sz="1100" b="1" i="1" dirty="0" smtClean="0">
-                            <a:latin typeface="Cambria Math" panose="02040503050406030204" pitchFamily="18" charset="0"/>
-                          </a:rPr>
-                          <m:t>)</m:t>
-                        </m:r>
                       </m:oMath>
                     </m:oMathPara>
                   </a14:m>
-                  <a:endParaRPr lang="en-US" sz="1100" b="1" dirty="0"/>
+                  <a:endParaRPr lang="en-US" sz="1100" dirty="0"/>
                 </a:p>
               </p:txBody>
             </p:sp>
           </mc:Choice>
-          <mc:Fallback xmlns="">
+          <mc:Fallback>
             <p:sp>
               <p:nvSpPr>
                 <p:cNvPr id="27" name="TextBox 26">
@@ -37703,7 +37838,7 @@
                 <a:blipFill>
                   <a:blip r:embed="rId15"/>
                   <a:stretch>
-                    <a:fillRect l="-5970" r="-11940" b="-4651"/>
+                    <a:fillRect/>
                   </a:stretch>
                 </a:blipFill>
                 <a:ln>
@@ -39023,6 +39158,143 @@
           </a:p>
         </p:txBody>
       </p:sp>
+      <mc:AlternateContent xmlns:mc="http://schemas.openxmlformats.org/markup-compatibility/2006">
+        <mc:Choice xmlns:a14="http://schemas.microsoft.com/office/drawing/2010/main" Requires="a14">
+          <p:sp>
+            <p:nvSpPr>
+              <p:cNvPr id="40" name="TextBox 39">
+                <a:extLst>
+                  <a:ext uri="{FF2B5EF4-FFF2-40B4-BE49-F238E27FC236}">
+                    <a16:creationId xmlns:a16="http://schemas.microsoft.com/office/drawing/2014/main" id="{44772B81-037E-51FF-DC68-F5CCBEC4413F}"/>
+                  </a:ext>
+                </a:extLst>
+              </p:cNvPr>
+              <p:cNvSpPr txBox="1"/>
+              <p:nvPr/>
+            </p:nvSpPr>
+            <p:spPr>
+              <a:xfrm>
+                <a:off x="4320773" y="1309184"/>
+                <a:ext cx="408946" cy="261610"/>
+              </a:xfrm>
+              <a:prstGeom prst="rect">
+                <a:avLst/>
+              </a:prstGeom>
+              <a:solidFill>
+                <a:schemeClr val="accent2"/>
+              </a:solidFill>
+              <a:ln>
+                <a:noFill/>
+              </a:ln>
+            </p:spPr>
+            <p:style>
+              <a:lnRef idx="0">
+                <a:scrgbClr r="0" g="0" b="0"/>
+              </a:lnRef>
+              <a:fillRef idx="0">
+                <a:scrgbClr r="0" g="0" b="0"/>
+              </a:fillRef>
+              <a:effectRef idx="0">
+                <a:scrgbClr r="0" g="0" b="0"/>
+              </a:effectRef>
+              <a:fontRef idx="minor">
+                <a:schemeClr val="lt1"/>
+              </a:fontRef>
+            </p:style>
+            <p:txBody>
+              <a:bodyPr wrap="square" lIns="0" rIns="0" rtlCol="0">
+                <a:spAutoFit/>
+              </a:bodyPr>
+              <a:lstStyle/>
+              <a:p>
+                <a:pPr/>
+                <a14:m>
+                  <m:oMathPara xmlns:m="http://schemas.openxmlformats.org/officeDocument/2006/math">
+                    <m:oMathParaPr>
+                      <m:jc m:val="centerGroup"/>
+                    </m:oMathParaPr>
+                    <m:oMath xmlns:m="http://schemas.openxmlformats.org/officeDocument/2006/math">
+                      <m:sSub>
+                        <m:sSubPr>
+                          <m:ctrlPr>
+                            <a:rPr lang="en-US" sz="1100" i="1" dirty="0" smtClean="0">
+                              <a:latin typeface="Cambria Math" panose="02040503050406030204" pitchFamily="18" charset="0"/>
+                            </a:rPr>
+                          </m:ctrlPr>
+                        </m:sSubPr>
+                        <m:e>
+                          <m:r>
+                            <a:rPr lang="en-US" sz="1100" b="0" i="1" dirty="0" smtClean="0">
+                              <a:latin typeface="Cambria Math" panose="02040503050406030204" pitchFamily="18" charset="0"/>
+                            </a:rPr>
+                            <m:t>𝑟</m:t>
+                          </m:r>
+                        </m:e>
+                        <m:sub>
+                          <m:r>
+                            <a:rPr lang="en-US" sz="1100" b="0" i="1" dirty="0" smtClean="0">
+                              <a:latin typeface="Cambria Math" panose="02040503050406030204" pitchFamily="18" charset="0"/>
+                            </a:rPr>
+                            <m:t>0</m:t>
+                          </m:r>
+                        </m:sub>
+                      </m:sSub>
+                    </m:oMath>
+                  </m:oMathPara>
+                </a14:m>
+                <a:endParaRPr lang="en-US" sz="1100" dirty="0"/>
+              </a:p>
+            </p:txBody>
+          </p:sp>
+        </mc:Choice>
+        <mc:Fallback>
+          <p:sp>
+            <p:nvSpPr>
+              <p:cNvPr id="40" name="TextBox 39">
+                <a:extLst>
+                  <a:ext uri="{FF2B5EF4-FFF2-40B4-BE49-F238E27FC236}">
+                    <a16:creationId xmlns:a16="http://schemas.microsoft.com/office/drawing/2014/main" id="{44772B81-037E-51FF-DC68-F5CCBEC4413F}"/>
+                  </a:ext>
+                </a:extLst>
+              </p:cNvPr>
+              <p:cNvSpPr txBox="1">
+                <a:spLocks noRot="1" noChangeAspect="1" noMove="1" noResize="1" noEditPoints="1" noAdjustHandles="1" noChangeArrowheads="1" noChangeShapeType="1" noTextEdit="1"/>
+              </p:cNvSpPr>
+              <p:nvPr/>
+            </p:nvSpPr>
+            <p:spPr>
+              <a:xfrm>
+                <a:off x="4320773" y="1309184"/>
+                <a:ext cx="408946" cy="261610"/>
+              </a:xfrm>
+              <a:prstGeom prst="rect">
+                <a:avLst/>
+              </a:prstGeom>
+              <a:blipFill>
+                <a:blip r:embed="rId22"/>
+                <a:stretch>
+                  <a:fillRect/>
+                </a:stretch>
+              </a:blipFill>
+              <a:ln>
+                <a:noFill/>
+              </a:ln>
+            </p:spPr>
+            <p:txBody>
+              <a:bodyPr/>
+              <a:lstStyle/>
+              <a:p>
+                <a:r>
+                  <a:rPr lang="en-US">
+                    <a:noFill/>
+                  </a:rPr>
+                  <a:t> </a:t>
+                </a:r>
+              </a:p>
+            </p:txBody>
+          </p:sp>
+        </mc:Fallback>
+      </mc:AlternateContent>
     </p:spTree>
     <p:extLst>
       <p:ext uri="{BB962C8B-B14F-4D97-AF65-F5344CB8AC3E}">
@@ -39302,8 +39574,8 @@
           </a:p>
         </p:txBody>
       </p:sp>
-      <mc:AlternateContent xmlns:mc="http://schemas.openxmlformats.org/markup-compatibility/2006">
-        <mc:Choice xmlns:a14="http://schemas.microsoft.com/office/drawing/2010/main" Requires="a14">
+      <mc:AlternateContent xmlns:mc="http://schemas.openxmlformats.org/markup-compatibility/2006" xmlns:a14="http://schemas.microsoft.com/office/drawing/2010/main">
+        <mc:Choice Requires="a14">
           <p:sp>
             <p:nvSpPr>
               <p:cNvPr id="3" name="Content Placeholder 2">
@@ -39849,7 +40121,7 @@
             </p:txBody>
           </p:sp>
         </mc:Choice>
-        <mc:Fallback>
+        <mc:Fallback xmlns="">
           <p:sp>
             <p:nvSpPr>
               <p:cNvPr id="3" name="Content Placeholder 2">
@@ -44309,8 +44581,8 @@
           </a:p>
         </p:txBody>
       </p:sp>
-      <mc:AlternateContent xmlns:mc="http://schemas.openxmlformats.org/markup-compatibility/2006">
-        <mc:Choice xmlns:a14="http://schemas.microsoft.com/office/drawing/2010/main" Requires="a14">
+      <mc:AlternateContent xmlns:mc="http://schemas.openxmlformats.org/markup-compatibility/2006" xmlns:a14="http://schemas.microsoft.com/office/drawing/2010/main">
+        <mc:Choice Requires="a14">
           <p:sp>
             <p:nvSpPr>
               <p:cNvPr id="3" name="Content Placeholder 2">
@@ -44869,7 +45141,7 @@
             </p:txBody>
           </p:sp>
         </mc:Choice>
-        <mc:Fallback>
+        <mc:Fallback xmlns="">
           <p:sp>
             <p:nvSpPr>
               <p:cNvPr id="3" name="Content Placeholder 2">
@@ -46084,8 +46356,8 @@
           </a:p>
         </p:txBody>
       </p:sp>
-      <mc:AlternateContent xmlns:mc="http://schemas.openxmlformats.org/markup-compatibility/2006">
-        <mc:Choice xmlns:a14="http://schemas.microsoft.com/office/drawing/2010/main" Requires="a14">
+      <mc:AlternateContent xmlns:mc="http://schemas.openxmlformats.org/markup-compatibility/2006" xmlns:a14="http://schemas.microsoft.com/office/drawing/2010/main">
+        <mc:Choice Requires="a14">
           <p:sp>
             <p:nvSpPr>
               <p:cNvPr id="3" name="Content Placeholder 2">
@@ -46782,7 +47054,7 @@
             </p:txBody>
           </p:sp>
         </mc:Choice>
-        <mc:Fallback>
+        <mc:Fallback xmlns="">
           <p:sp>
             <p:nvSpPr>
               <p:cNvPr id="3" name="Content Placeholder 2">
